--- a/03-课件PPT/讲次版/第1章-1-讲次 1-1 · 能力模型与 LLM API 基础.pptx
+++ b/03-课件PPT/讲次版/第1章-1-讲次 1-1 · 能力模型与 LLM API 基础.pptx
@@ -21366,7 +21366,7 @@
           <a:noFill/>
         </p:spPr>
         <p:txBody>
-          <a:bodyPr wrap="none" anchor="ctr">
+          <a:bodyPr wrap="square" anchor="ctr">
             <a:spAutoFit/>
           </a:bodyPr>
           <a:lstStyle/>
@@ -21497,7 +21497,7 @@
           <a:noFill/>
         </p:spPr>
         <p:txBody>
-          <a:bodyPr wrap="none" anchor="ctr">
+          <a:bodyPr wrap="square" anchor="ctr">
             <a:spAutoFit/>
           </a:bodyPr>
           <a:lstStyle/>
@@ -21879,7 +21879,7 @@
           <a:noFill/>
         </p:spPr>
         <p:txBody>
-          <a:bodyPr wrap="none" anchor="ctr">
+          <a:bodyPr wrap="square" anchor="ctr">
             <a:spAutoFit/>
           </a:bodyPr>
           <a:lstStyle/>
@@ -21890,7 +21890,7 @@
               </a:lnSpc>
             </a:pPr>
             <a:r>
-              <a:rPr sz="900" b="1">
+              <a:rPr sz="1300" b="1">
                 <a:solidFill>
                   <a:srgbClr val="0B1D3A"/>
                 </a:solidFill>
@@ -22261,7 +22261,7 @@
           <a:noFill/>
         </p:spPr>
         <p:txBody>
-          <a:bodyPr wrap="none" anchor="ctr">
+          <a:bodyPr wrap="square" anchor="ctr">
             <a:spAutoFit/>
           </a:bodyPr>
           <a:lstStyle/>
@@ -22272,7 +22272,7 @@
               </a:lnSpc>
             </a:pPr>
             <a:r>
-              <a:rPr sz="900" b="1">
+              <a:rPr sz="1300" b="1">
                 <a:solidFill>
                   <a:srgbClr val="0B1D3A"/>
                 </a:solidFill>
@@ -22392,7 +22392,7 @@
           <a:noFill/>
         </p:spPr>
         <p:txBody>
-          <a:bodyPr wrap="none" anchor="ctr">
+          <a:bodyPr wrap="square" anchor="ctr">
             <a:spAutoFit/>
           </a:bodyPr>
           <a:lstStyle/>
@@ -22403,7 +22403,7 @@
               </a:lnSpc>
             </a:pPr>
             <a:r>
-              <a:rPr sz="1100" b="1">
+              <a:rPr sz="1300" b="1">
                 <a:solidFill>
                   <a:srgbClr val="0B1D3A"/>
                 </a:solidFill>
@@ -22523,7 +22523,7 @@
           <a:noFill/>
         </p:spPr>
         <p:txBody>
-          <a:bodyPr wrap="none" anchor="ctr">
+          <a:bodyPr wrap="square" anchor="ctr">
             <a:spAutoFit/>
           </a:bodyPr>
           <a:lstStyle/>
@@ -22905,7 +22905,7 @@
           <a:noFill/>
         </p:spPr>
         <p:txBody>
-          <a:bodyPr wrap="none" anchor="ctr">
+          <a:bodyPr wrap="square" anchor="ctr">
             <a:spAutoFit/>
           </a:bodyPr>
           <a:lstStyle/>
@@ -22916,7 +22916,7 @@
               </a:lnSpc>
             </a:pPr>
             <a:r>
-              <a:rPr sz="1100" b="1">
+              <a:rPr sz="1300" b="1">
                 <a:solidFill>
                   <a:srgbClr val="0B1D3A"/>
                 </a:solidFill>
@@ -23036,7 +23036,7 @@
           <a:noFill/>
         </p:spPr>
         <p:txBody>
-          <a:bodyPr wrap="none" anchor="ctr">
+          <a:bodyPr wrap="square" anchor="ctr">
             <a:spAutoFit/>
           </a:bodyPr>
           <a:lstStyle/>
@@ -46798,7 +46798,7 @@
           <a:noFill/>
         </p:spPr>
         <p:txBody>
-          <a:bodyPr wrap="none" anchor="ctr">
+          <a:bodyPr wrap="square" anchor="ctr">
             <a:spAutoFit/>
           </a:bodyPr>
           <a:lstStyle/>
@@ -46929,7 +46929,7 @@
           <a:noFill/>
         </p:spPr>
         <p:txBody>
-          <a:bodyPr wrap="none" anchor="ctr">
+          <a:bodyPr wrap="square" anchor="ctr">
             <a:spAutoFit/>
           </a:bodyPr>
           <a:lstStyle/>
@@ -47060,7 +47060,7 @@
           <a:noFill/>
         </p:spPr>
         <p:txBody>
-          <a:bodyPr wrap="none" anchor="ctr">
+          <a:bodyPr wrap="square" anchor="ctr">
             <a:spAutoFit/>
           </a:bodyPr>
           <a:lstStyle/>
@@ -47442,7 +47442,7 @@
           <a:noFill/>
         </p:spPr>
         <p:txBody>
-          <a:bodyPr wrap="none" anchor="ctr">
+          <a:bodyPr wrap="square" anchor="ctr">
             <a:spAutoFit/>
           </a:bodyPr>
           <a:lstStyle/>
@@ -47453,7 +47453,7 @@
               </a:lnSpc>
             </a:pPr>
             <a:r>
-              <a:rPr sz="1100" b="1">
+              <a:rPr sz="1300" b="1">
                 <a:solidFill>
                   <a:srgbClr val="0B1D3A"/>
                 </a:solidFill>
@@ -47573,7 +47573,7 @@
           <a:noFill/>
         </p:spPr>
         <p:txBody>
-          <a:bodyPr wrap="none" anchor="ctr">
+          <a:bodyPr wrap="square" anchor="ctr">
             <a:spAutoFit/>
           </a:bodyPr>
           <a:lstStyle/>
@@ -47704,7 +47704,7 @@
           <a:noFill/>
         </p:spPr>
         <p:txBody>
-          <a:bodyPr wrap="none" anchor="ctr">
+          <a:bodyPr wrap="square" anchor="ctr">
             <a:spAutoFit/>
           </a:bodyPr>
           <a:lstStyle/>
@@ -47986,7 +47986,7 @@
         <p:spPr>
           <a:xfrm>
             <a:off x="1905000" y="3495674"/>
-            <a:ext cx="1333500" cy="1023937"/>
+            <a:ext cx="2076450" cy="473868"/>
           </a:xfrm>
           <a:prstGeom prst="roundRect">
             <a:avLst>
@@ -48034,7 +48034,7 @@
         <p:spPr>
           <a:xfrm>
             <a:off x="1905000" y="3495674"/>
-            <a:ext cx="47625" cy="1023937"/>
+            <a:ext cx="47625" cy="473868"/>
           </a:xfrm>
           <a:prstGeom prst="rect">
             <a:avLst/>
@@ -48078,7 +48078,7 @@
         <p:spPr>
           <a:xfrm>
             <a:off x="2057400" y="3495674"/>
-            <a:ext cx="1066800" cy="1023937"/>
+            <a:ext cx="1809750" cy="473868"/>
           </a:xfrm>
           <a:prstGeom prst="rect">
             <a:avLst/>
@@ -48086,7 +48086,7 @@
           <a:noFill/>
         </p:spPr>
         <p:txBody>
-          <a:bodyPr wrap="none" anchor="ctr">
+          <a:bodyPr wrap="square" anchor="ctr">
             <a:spAutoFit/>
           </a:bodyPr>
           <a:lstStyle/>
@@ -48116,8 +48116,8 @@
         </p:nvSpPr>
         <p:spPr>
           <a:xfrm>
-            <a:off x="3390900" y="3495674"/>
-            <a:ext cx="1333500" cy="1023937"/>
+            <a:off x="4133850" y="3495674"/>
+            <a:ext cx="2076450" cy="473868"/>
           </a:xfrm>
           <a:prstGeom prst="roundRect">
             <a:avLst>
@@ -48164,8 +48164,8 @@
         </p:nvSpPr>
         <p:spPr>
           <a:xfrm>
-            <a:off x="3390900" y="3495674"/>
-            <a:ext cx="47625" cy="1023937"/>
+            <a:off x="4133850" y="3495674"/>
+            <a:ext cx="47625" cy="473868"/>
           </a:xfrm>
           <a:prstGeom prst="rect">
             <a:avLst/>
@@ -48208,8 +48208,8 @@
         </p:nvSpPr>
         <p:spPr>
           <a:xfrm>
-            <a:off x="3543300" y="3495674"/>
-            <a:ext cx="1066800" cy="1023937"/>
+            <a:off x="4286250" y="3495674"/>
+            <a:ext cx="1809750" cy="473868"/>
           </a:xfrm>
           <a:prstGeom prst="rect">
             <a:avLst/>
@@ -48217,7 +48217,7 @@
           <a:noFill/>
         </p:spPr>
         <p:txBody>
-          <a:bodyPr wrap="none" anchor="ctr">
+          <a:bodyPr wrap="square" anchor="ctr">
             <a:spAutoFit/>
           </a:bodyPr>
           <a:lstStyle/>
@@ -48247,8 +48247,8 @@
         </p:nvSpPr>
         <p:spPr>
           <a:xfrm>
-            <a:off x="4876800" y="3495674"/>
-            <a:ext cx="1333500" cy="1023937"/>
+            <a:off x="6362700" y="3495674"/>
+            <a:ext cx="2076450" cy="473868"/>
           </a:xfrm>
           <a:prstGeom prst="roundRect">
             <a:avLst>
@@ -48295,8 +48295,8 @@
         </p:nvSpPr>
         <p:spPr>
           <a:xfrm>
-            <a:off x="4876800" y="3495674"/>
-            <a:ext cx="47625" cy="1023937"/>
+            <a:off x="6362700" y="3495674"/>
+            <a:ext cx="47625" cy="473868"/>
           </a:xfrm>
           <a:prstGeom prst="rect">
             <a:avLst/>
@@ -48339,8 +48339,8 @@
         </p:nvSpPr>
         <p:spPr>
           <a:xfrm>
-            <a:off x="5029200" y="3495674"/>
-            <a:ext cx="1066800" cy="1023937"/>
+            <a:off x="6515100" y="3495674"/>
+            <a:ext cx="1809750" cy="473868"/>
           </a:xfrm>
           <a:prstGeom prst="rect">
             <a:avLst/>
@@ -48348,7 +48348,7 @@
           <a:noFill/>
         </p:spPr>
         <p:txBody>
-          <a:bodyPr wrap="none" anchor="ctr">
+          <a:bodyPr wrap="square" anchor="ctr">
             <a:spAutoFit/>
           </a:bodyPr>
           <a:lstStyle/>
@@ -48378,8 +48378,8 @@
         </p:nvSpPr>
         <p:spPr>
           <a:xfrm>
-            <a:off x="6362700" y="3495674"/>
-            <a:ext cx="1333500" cy="1023937"/>
+            <a:off x="8591550" y="3495674"/>
+            <a:ext cx="2076450" cy="473868"/>
           </a:xfrm>
           <a:prstGeom prst="roundRect">
             <a:avLst>
@@ -48426,8 +48426,8 @@
         </p:nvSpPr>
         <p:spPr>
           <a:xfrm>
-            <a:off x="6362700" y="3495674"/>
-            <a:ext cx="47625" cy="1023937"/>
+            <a:off x="8591550" y="3495674"/>
+            <a:ext cx="47625" cy="473868"/>
           </a:xfrm>
           <a:prstGeom prst="rect">
             <a:avLst/>
@@ -48470,8 +48470,8 @@
         </p:nvSpPr>
         <p:spPr>
           <a:xfrm>
-            <a:off x="6515100" y="3495674"/>
-            <a:ext cx="1066800" cy="1023937"/>
+            <a:off x="8743950" y="3495674"/>
+            <a:ext cx="1809750" cy="473868"/>
           </a:xfrm>
           <a:prstGeom prst="rect">
             <a:avLst/>
@@ -48479,7 +48479,7 @@
           <a:noFill/>
         </p:spPr>
         <p:txBody>
-          <a:bodyPr wrap="none" anchor="ctr">
+          <a:bodyPr wrap="square" anchor="ctr">
             <a:spAutoFit/>
           </a:bodyPr>
           <a:lstStyle/>
@@ -48509,8 +48509,8 @@
         </p:nvSpPr>
         <p:spPr>
           <a:xfrm>
-            <a:off x="7848600" y="3495674"/>
-            <a:ext cx="1333500" cy="1023937"/>
+            <a:off x="1905000" y="4045742"/>
+            <a:ext cx="2076450" cy="473868"/>
           </a:xfrm>
           <a:prstGeom prst="roundRect">
             <a:avLst>
@@ -48557,8 +48557,8 @@
         </p:nvSpPr>
         <p:spPr>
           <a:xfrm>
-            <a:off x="7848600" y="3495674"/>
-            <a:ext cx="47625" cy="1023937"/>
+            <a:off x="1905000" y="4045742"/>
+            <a:ext cx="47625" cy="473868"/>
           </a:xfrm>
           <a:prstGeom prst="rect">
             <a:avLst/>
@@ -48601,8 +48601,8 @@
         </p:nvSpPr>
         <p:spPr>
           <a:xfrm>
-            <a:off x="8001000" y="3495674"/>
-            <a:ext cx="1066800" cy="1023937"/>
+            <a:off x="2057400" y="4045742"/>
+            <a:ext cx="1809750" cy="473868"/>
           </a:xfrm>
           <a:prstGeom prst="rect">
             <a:avLst/>
@@ -48610,7 +48610,7 @@
           <a:noFill/>
         </p:spPr>
         <p:txBody>
-          <a:bodyPr wrap="none" anchor="ctr">
+          <a:bodyPr wrap="square" anchor="ctr">
             <a:spAutoFit/>
           </a:bodyPr>
           <a:lstStyle/>
@@ -48621,7 +48621,7 @@
               </a:lnSpc>
             </a:pPr>
             <a:r>
-              <a:rPr sz="1100" b="1">
+              <a:rPr sz="1300" b="1">
                 <a:solidFill>
                   <a:srgbClr val="0B1D3A"/>
                 </a:solidFill>
@@ -48640,8 +48640,8 @@
         </p:nvSpPr>
         <p:spPr>
           <a:xfrm>
-            <a:off x="9334500" y="3495674"/>
-            <a:ext cx="1333500" cy="1023937"/>
+            <a:off x="4133850" y="4045742"/>
+            <a:ext cx="2076450" cy="473868"/>
           </a:xfrm>
           <a:prstGeom prst="roundRect">
             <a:avLst>
@@ -48688,8 +48688,8 @@
         </p:nvSpPr>
         <p:spPr>
           <a:xfrm>
-            <a:off x="9334500" y="3495674"/>
-            <a:ext cx="47625" cy="1023937"/>
+            <a:off x="4133850" y="4045742"/>
+            <a:ext cx="47625" cy="473868"/>
           </a:xfrm>
           <a:prstGeom prst="rect">
             <a:avLst/>
@@ -48732,8 +48732,8 @@
         </p:nvSpPr>
         <p:spPr>
           <a:xfrm>
-            <a:off x="9486900" y="3495674"/>
-            <a:ext cx="1066800" cy="1023937"/>
+            <a:off x="4286250" y="4045742"/>
+            <a:ext cx="1809750" cy="473868"/>
           </a:xfrm>
           <a:prstGeom prst="rect">
             <a:avLst/>
@@ -48741,7 +48741,7 @@
           <a:noFill/>
         </p:spPr>
         <p:txBody>
-          <a:bodyPr wrap="none" anchor="ctr">
+          <a:bodyPr wrap="square" anchor="ctr">
             <a:spAutoFit/>
           </a:bodyPr>
           <a:lstStyle/>
@@ -49123,7 +49123,7 @@
           <a:noFill/>
         </p:spPr>
         <p:txBody>
-          <a:bodyPr wrap="none" anchor="ctr">
+          <a:bodyPr wrap="square" anchor="ctr">
             <a:spAutoFit/>
           </a:bodyPr>
           <a:lstStyle/>
@@ -49254,7 +49254,7 @@
           <a:noFill/>
         </p:spPr>
         <p:txBody>
-          <a:bodyPr wrap="none" anchor="ctr">
+          <a:bodyPr wrap="square" anchor="ctr">
             <a:spAutoFit/>
           </a:bodyPr>
           <a:lstStyle/>
@@ -49385,7 +49385,7 @@
           <a:noFill/>
         </p:spPr>
         <p:txBody>
-          <a:bodyPr wrap="none" anchor="ctr">
+          <a:bodyPr wrap="square" anchor="ctr">
             <a:spAutoFit/>
           </a:bodyPr>
           <a:lstStyle/>
@@ -49516,7 +49516,7 @@
           <a:noFill/>
         </p:spPr>
         <p:txBody>
-          <a:bodyPr wrap="none" anchor="ctr">
+          <a:bodyPr wrap="square" anchor="ctr">
             <a:spAutoFit/>
           </a:bodyPr>
           <a:lstStyle/>
